--- a/presentations/Final_Presentation.pptx
+++ b/presentations/Final_Presentation.pptx
@@ -351,7 +351,7 @@
             <a:fld id="{1D8BD707-D9CF-40AE-B4C6-C98DA3205C09}" type="datetimeFigureOut">
               <a:rPr lang="en-US" smtClean="0"/>
               <a:pPr/>
-              <a:t>6/23/2026</a:t>
+              <a:t>6/24/2026</a:t>
             </a:fld>
             <a:endParaRPr lang="en-US"/>
           </a:p>
@@ -516,7 +516,7 @@
             <a:fld id="{1D8BD707-D9CF-40AE-B4C6-C98DA3205C09}" type="datetimeFigureOut">
               <a:rPr lang="en-US" smtClean="0"/>
               <a:pPr/>
-              <a:t>6/23/2026</a:t>
+              <a:t>6/24/2026</a:t>
             </a:fld>
             <a:endParaRPr lang="en-US"/>
           </a:p>
@@ -691,7 +691,7 @@
             <a:fld id="{1D8BD707-D9CF-40AE-B4C6-C98DA3205C09}" type="datetimeFigureOut">
               <a:rPr lang="en-US" smtClean="0"/>
               <a:pPr/>
-              <a:t>6/23/2026</a:t>
+              <a:t>6/24/2026</a:t>
             </a:fld>
             <a:endParaRPr lang="en-US"/>
           </a:p>
@@ -856,7 +856,7 @@
             <a:fld id="{1D8BD707-D9CF-40AE-B4C6-C98DA3205C09}" type="datetimeFigureOut">
               <a:rPr lang="en-US" smtClean="0"/>
               <a:pPr/>
-              <a:t>6/23/2026</a:t>
+              <a:t>6/24/2026</a:t>
             </a:fld>
             <a:endParaRPr lang="en-US"/>
           </a:p>
@@ -1098,7 +1098,7 @@
             <a:fld id="{1D8BD707-D9CF-40AE-B4C6-C98DA3205C09}" type="datetimeFigureOut">
               <a:rPr lang="en-US" smtClean="0"/>
               <a:pPr/>
-              <a:t>6/23/2026</a:t>
+              <a:t>6/24/2026</a:t>
             </a:fld>
             <a:endParaRPr lang="en-US"/>
           </a:p>
@@ -1380,7 +1380,7 @@
             <a:fld id="{1D8BD707-D9CF-40AE-B4C6-C98DA3205C09}" type="datetimeFigureOut">
               <a:rPr lang="en-US" smtClean="0"/>
               <a:pPr/>
-              <a:t>6/23/2026</a:t>
+              <a:t>6/24/2026</a:t>
             </a:fld>
             <a:endParaRPr lang="en-US"/>
           </a:p>
@@ -1796,7 +1796,7 @@
             <a:fld id="{1D8BD707-D9CF-40AE-B4C6-C98DA3205C09}" type="datetimeFigureOut">
               <a:rPr lang="en-US" smtClean="0"/>
               <a:pPr/>
-              <a:t>6/23/2026</a:t>
+              <a:t>6/24/2026</a:t>
             </a:fld>
             <a:endParaRPr lang="en-US"/>
           </a:p>
@@ -1910,7 +1910,7 @@
             <a:fld id="{1D8BD707-D9CF-40AE-B4C6-C98DA3205C09}" type="datetimeFigureOut">
               <a:rPr lang="en-US" smtClean="0"/>
               <a:pPr/>
-              <a:t>6/23/2026</a:t>
+              <a:t>6/24/2026</a:t>
             </a:fld>
             <a:endParaRPr lang="en-US"/>
           </a:p>
@@ -2002,7 +2002,7 @@
             <a:fld id="{1D8BD707-D9CF-40AE-B4C6-C98DA3205C09}" type="datetimeFigureOut">
               <a:rPr lang="en-US" smtClean="0"/>
               <a:pPr/>
-              <a:t>6/23/2026</a:t>
+              <a:t>6/24/2026</a:t>
             </a:fld>
             <a:endParaRPr lang="en-US"/>
           </a:p>
@@ -2274,7 +2274,7 @@
             <a:fld id="{1D8BD707-D9CF-40AE-B4C6-C98DA3205C09}" type="datetimeFigureOut">
               <a:rPr lang="en-US" smtClean="0"/>
               <a:pPr/>
-              <a:t>6/23/2026</a:t>
+              <a:t>6/24/2026</a:t>
             </a:fld>
             <a:endParaRPr lang="en-US"/>
           </a:p>
@@ -2523,7 +2523,7 @@
             <a:fld id="{1D8BD707-D9CF-40AE-B4C6-C98DA3205C09}" type="datetimeFigureOut">
               <a:rPr lang="en-US" smtClean="0"/>
               <a:pPr/>
-              <a:t>6/23/2026</a:t>
+              <a:t>6/24/2026</a:t>
             </a:fld>
             <a:endParaRPr lang="en-US"/>
           </a:p>
@@ -2731,7 +2731,7 @@
             <a:fld id="{1D8BD707-D9CF-40AE-B4C6-C98DA3205C09}" type="datetimeFigureOut">
               <a:rPr lang="en-US" smtClean="0"/>
               <a:pPr/>
-              <a:t>6/23/2026</a:t>
+              <a:t>6/24/2026</a:t>
             </a:fld>
             <a:endParaRPr lang="en-US"/>
           </a:p>
@@ -4301,7 +4301,7 @@
         <p:spPr>
           <a:xfrm>
             <a:off x="12030114" y="3250738"/>
-            <a:ext cx="6118907" cy="7176099"/>
+            <a:ext cx="6118907" cy="5715026"/>
           </a:xfrm>
           <a:prstGeom prst="rect">
             <a:avLst/>
@@ -4313,6 +4313,216 @@
           </a:bodyPr>
           <a:lstStyle/>
           <a:p>
+            <a:pPr marL="342900" indent="-342900">
+              <a:buFont typeface="Arial" panose="020B0604020202020204" pitchFamily="34" charset="0"/>
+              <a:buChar char="•"/>
+            </a:pPr>
+            <a:r>
+              <a:rPr lang="" sz="2476" dirty="0">
+                <a:solidFill>
+                  <a:srgbClr val="000000"/>
+                </a:solidFill>
+                <a:latin typeface="Agrandir"/>
+              </a:rPr>
+              <a:t>Loss Function: Mean Squared Error (MSE)</a:t>
+            </a:r>
+          </a:p>
+          <a:p>
+            <a:pPr marL="342900" indent="-342900">
+              <a:buFont typeface="Arial" panose="020B0604020202020204" pitchFamily="34" charset="0"/>
+              <a:buChar char="•"/>
+            </a:pPr>
+            <a:r>
+              <a:rPr lang="" sz="2476" dirty="0">
+                <a:solidFill>
+                  <a:srgbClr val="000000"/>
+                </a:solidFill>
+                <a:latin typeface="Agrandir"/>
+              </a:rPr>
+              <a:t>Learning Rate: 1e-5</a:t>
+            </a:r>
+          </a:p>
+          <a:p>
+            <a:pPr marL="342900" indent="-342900">
+              <a:buFont typeface="Arial" panose="020B0604020202020204" pitchFamily="34" charset="0"/>
+              <a:buChar char="•"/>
+            </a:pPr>
+            <a:r>
+              <a:rPr lang="" sz="2476" dirty="0">
+                <a:solidFill>
+                  <a:srgbClr val="000000"/>
+                </a:solidFill>
+                <a:latin typeface="Agrandir"/>
+              </a:rPr>
+              <a:t>Batch Size: 8</a:t>
+            </a:r>
+          </a:p>
+          <a:p>
+            <a:pPr marL="342900" indent="-342900">
+              <a:buFont typeface="Arial" panose="020B0604020202020204" pitchFamily="34" charset="0"/>
+              <a:buChar char="•"/>
+            </a:pPr>
+            <a:r>
+              <a:rPr lang="" sz="2476" dirty="0">
+                <a:solidFill>
+                  <a:srgbClr val="000000"/>
+                </a:solidFill>
+                <a:latin typeface="Agrandir"/>
+              </a:rPr>
+              <a:t>Epochs: 3</a:t>
+            </a:r>
+          </a:p>
+          <a:p>
+            <a:pPr marL="342900" indent="-342900">
+              <a:buFont typeface="Arial" panose="020B0604020202020204" pitchFamily="34" charset="0"/>
+              <a:buChar char="•"/>
+            </a:pPr>
+            <a:r>
+              <a:rPr lang="" sz="2476" dirty="0">
+                <a:solidFill>
+                  <a:srgbClr val="000000"/>
+                </a:solidFill>
+                <a:latin typeface="Agrandir"/>
+              </a:rPr>
+              <a:t>Weight Decay: 0.05</a:t>
+            </a:r>
+          </a:p>
+          <a:p>
+            <a:pPr marL="342900" indent="-342900">
+              <a:buFont typeface="Arial" panose="020B0604020202020204" pitchFamily="34" charset="0"/>
+              <a:buChar char="•"/>
+            </a:pPr>
+            <a:r>
+              <a:rPr lang="" sz="2476" dirty="0">
+                <a:solidFill>
+                  <a:srgbClr val="000000"/>
+                </a:solidFill>
+                <a:latin typeface="Agrandir"/>
+              </a:rPr>
+              <a:t>Maximum Sequence Length: 256</a:t>
+            </a:r>
+          </a:p>
+          <a:p>
+            <a:pPr marL="342900" indent="-342900">
+              <a:buFont typeface="Arial" panose="020B0604020202020204" pitchFamily="34" charset="0"/>
+              <a:buChar char="•"/>
+            </a:pPr>
+            <a:r>
+              <a:rPr lang="" sz="2476" dirty="0">
+                <a:solidFill>
+                  <a:srgbClr val="000000"/>
+                </a:solidFill>
+                <a:latin typeface="Agrandir"/>
+              </a:rPr>
+              <a:t>Hidden Dropout: 0.2</a:t>
+            </a:r>
+          </a:p>
+          <a:p>
+            <a:pPr marL="342900" indent="-342900">
+              <a:buFont typeface="Arial" panose="020B0604020202020204" pitchFamily="34" charset="0"/>
+              <a:buChar char="•"/>
+            </a:pPr>
+            <a:r>
+              <a:rPr lang="" sz="2476" dirty="0">
+                <a:solidFill>
+                  <a:srgbClr val="000000"/>
+                </a:solidFill>
+                <a:latin typeface="Agrandir"/>
+              </a:rPr>
+              <a:t>Attention Dropout: 0.2</a:t>
+            </a:r>
+          </a:p>
+          <a:p>
+            <a:pPr marL="342900" indent="-342900">
+              <a:buFont typeface="Arial" panose="020B0604020202020204" pitchFamily="34" charset="0"/>
+              <a:buChar char="•"/>
+            </a:pPr>
+            <a:r>
+              <a:rPr lang="" sz="2476" dirty="0">
+                <a:solidFill>
+                  <a:srgbClr val="000000"/>
+                </a:solidFill>
+                <a:latin typeface="Agrandir"/>
+              </a:rPr>
+              <a:t>Classifier Dropout: 0.2</a:t>
+            </a:r>
+          </a:p>
+          <a:p>
+            <a:pPr marL="342900" indent="-342900">
+              <a:buFont typeface="Arial" panose="020B0604020202020204" pitchFamily="34" charset="0"/>
+              <a:buChar char="•"/>
+            </a:pPr>
+            <a:r>
+              <a:rPr lang="" sz="2476" dirty="0">
+                <a:solidFill>
+                  <a:srgbClr val="000000"/>
+                </a:solidFill>
+                <a:latin typeface="Agrandir"/>
+              </a:rPr>
+              <a:t>Dynamic Padding (DataCollatorWithPadding)</a:t>
+            </a:r>
+          </a:p>
+          <a:p>
+            <a:pPr marL="342900" indent="-342900">
+              <a:buFont typeface="Arial" panose="020B0604020202020204" pitchFamily="34" charset="0"/>
+              <a:buChar char="•"/>
+            </a:pPr>
+            <a:r>
+              <a:rPr lang="" sz="2476" dirty="0">
+                <a:solidFill>
+                  <a:srgbClr val="000000"/>
+                </a:solidFill>
+                <a:latin typeface="Agrandir"/>
+              </a:rPr>
+              <a:t>Early Stopping (Patience = 1)</a:t>
+            </a:r>
+          </a:p>
+          <a:p>
+            <a:pPr marL="342900" indent="-342900">
+              <a:buFont typeface="Arial" panose="020B0604020202020204" pitchFamily="34" charset="0"/>
+              <a:buChar char="•"/>
+            </a:pPr>
+            <a:r>
+              <a:rPr lang="" sz="2476" dirty="0">
+                <a:solidFill>
+                  <a:srgbClr val="000000"/>
+                </a:solidFill>
+                <a:latin typeface="Agrandir"/>
+              </a:rPr>
+              <a:t>Best Model Selection using Validation Loss</a:t>
+            </a:r>
+          </a:p>
+        </p:txBody>
+      </p:sp>
+      <p:sp>
+        <p:nvSpPr>
+          <p:cNvPr id="14" name="TextBox 14"/>
+          <p:cNvSpPr txBox="1"/>
+          <p:nvPr/>
+        </p:nvSpPr>
+        <p:spPr>
+          <a:xfrm>
+            <a:off x="5959002" y="2929646"/>
+            <a:ext cx="6071112" cy="4432899"/>
+          </a:xfrm>
+          <a:prstGeom prst="rect">
+            <a:avLst/>
+          </a:prstGeom>
+        </p:spPr>
+        <p:txBody>
+          <a:bodyPr lIns="0" tIns="0" rIns="0" bIns="0" rtlCol="0" anchor="t">
+            <a:spAutoFit/>
+          </a:bodyPr>
+          <a:lstStyle/>
+          <a:p>
+            <a:pPr algn="l">
+              <a:lnSpc>
+                <a:spcPts val="3467"/>
+              </a:lnSpc>
+            </a:pPr>
+            <a:endParaRPr dirty="0"/>
+          </a:p>
+          <a:p>
             <a:pPr marL="534662" lvl="1" indent="-267331" algn="l">
               <a:lnSpc>
                 <a:spcPts val="3467"/>
@@ -4321,7 +4531,7 @@
               <a:buChar char="•"/>
             </a:pPr>
             <a:r>
-              <a:rPr lang="en-US" sz="2476">
+              <a:rPr lang="en-US" sz="2476" dirty="0">
                 <a:solidFill>
                   <a:srgbClr val="000000"/>
                 </a:solidFill>
@@ -4330,17 +4540,19 @@
                 <a:cs typeface="Agrandir"/>
                 <a:sym typeface="Agrandir"/>
               </a:rPr>
-              <a:t>Loss Function:</a:t>
-            </a:r>
-          </a:p>
-          <a:p>
-            <a:pPr algn="l">
-              <a:lnSpc>
-                <a:spcPts val="3746"/>
-              </a:lnSpc>
-            </a:pPr>
-            <a:r>
-              <a:rPr lang="en-US" sz="2676">
+              <a:t>Start from the validated synthetic review dataset</a:t>
+            </a:r>
+          </a:p>
+          <a:p>
+            <a:pPr marL="534662" lvl="1" indent="-267331" algn="l">
+              <a:lnSpc>
+                <a:spcPts val="3467"/>
+              </a:lnSpc>
+              <a:buFont typeface="Arial"/>
+              <a:buChar char="•"/>
+            </a:pPr>
+            <a:r>
+              <a:rPr lang="en-US" sz="2476" dirty="0">
                 <a:solidFill>
                   <a:srgbClr val="000000"/>
                 </a:solidFill>
@@ -4349,7 +4561,7 @@
                 <a:cs typeface="Agrandir"/>
                 <a:sym typeface="Agrandir"/>
               </a:rPr>
-              <a:t>         MSE = 1/n Σ(yᵢ - ŷᵢ)²</a:t>
+              <a:t>Split into Train / Validation / Test</a:t>
             </a:r>
           </a:p>
           <a:p>
@@ -4361,7 +4573,7 @@
               <a:buChar char="•"/>
             </a:pPr>
             <a:r>
-              <a:rPr lang="en-US" sz="2476">
+              <a:rPr lang="en-US" sz="2476" dirty="0">
                 <a:solidFill>
                   <a:srgbClr val="000000"/>
                 </a:solidFill>
@@ -4370,17 +4582,10 @@
                 <a:cs typeface="Agrandir"/>
                 <a:sym typeface="Agrandir"/>
               </a:rPr>
-              <a:t>Prediction thresholds:</a:t>
-            </a:r>
-          </a:p>
-          <a:p>
-            <a:pPr algn="l">
-              <a:lnSpc>
-                <a:spcPts val="3746"/>
-              </a:lnSpc>
-            </a:pPr>
-            <a:r>
-              <a:rPr lang="en-US" sz="2676">
+              <a:t>Fine-tune </a:t>
+            </a:r>
+            <a:r>
+              <a:rPr lang="en-US" sz="2476" dirty="0" err="1">
                 <a:solidFill>
                   <a:srgbClr val="000000"/>
                 </a:solidFill>
@@ -4389,180 +4594,9 @@
                 <a:cs typeface="Agrandir"/>
                 <a:sym typeface="Agrandir"/>
               </a:rPr>
-              <a:t>         ŷᵢ ≥ 0.5 → 1</a:t>
-            </a:r>
-          </a:p>
-          <a:p>
-            <a:pPr algn="l">
-              <a:lnSpc>
-                <a:spcPts val="3746"/>
-              </a:lnSpc>
-            </a:pPr>
-            <a:r>
-              <a:rPr lang="en-US" sz="2676">
-                <a:solidFill>
-                  <a:srgbClr val="000000"/>
-                </a:solidFill>
-                <a:latin typeface="Agrandir"/>
-                <a:ea typeface="Agrandir"/>
-                <a:cs typeface="Agrandir"/>
-                <a:sym typeface="Agrandir"/>
-              </a:rPr>
-              <a:t>         ŷᵢ ≤ -0.5 → -1</a:t>
-            </a:r>
-          </a:p>
-          <a:p>
-            <a:pPr algn="l">
-              <a:lnSpc>
-                <a:spcPts val="3746"/>
-              </a:lnSpc>
-            </a:pPr>
-            <a:r>
-              <a:rPr lang="en-US" sz="2676">
-                <a:solidFill>
-                  <a:srgbClr val="000000"/>
-                </a:solidFill>
-                <a:latin typeface="Agrandir"/>
-                <a:ea typeface="Agrandir"/>
-                <a:cs typeface="Agrandir"/>
-                <a:sym typeface="Agrandir"/>
-              </a:rPr>
-              <a:t>         otherwise → 0</a:t>
-            </a:r>
-          </a:p>
-          <a:p>
-            <a:pPr marL="534662" lvl="1" indent="-267331" algn="l">
-              <a:lnSpc>
-                <a:spcPts val="3467"/>
-              </a:lnSpc>
-              <a:buFont typeface="Arial"/>
-              <a:buChar char="•"/>
-            </a:pPr>
-            <a:r>
-              <a:rPr lang="en-US" sz="2476">
-                <a:solidFill>
-                  <a:srgbClr val="000000"/>
-                </a:solidFill>
-                <a:latin typeface="Agrandir"/>
-                <a:ea typeface="Agrandir"/>
-                <a:cs typeface="Agrandir"/>
-                <a:sym typeface="Agrandir"/>
-              </a:rPr>
-              <a:t>Dynamic padding for efficient training</a:t>
-            </a:r>
-          </a:p>
-          <a:p>
-            <a:pPr marL="534662" lvl="1" indent="-267331" algn="l">
-              <a:lnSpc>
-                <a:spcPts val="3467"/>
-              </a:lnSpc>
-              <a:buFont typeface="Arial"/>
-              <a:buChar char="•"/>
-            </a:pPr>
-            <a:r>
-              <a:rPr lang="en-US" sz="2476">
-                <a:solidFill>
-                  <a:srgbClr val="000000"/>
-                </a:solidFill>
-                <a:latin typeface="Agrandir"/>
-                <a:ea typeface="Agrandir"/>
-                <a:cs typeface="Agrandir"/>
-                <a:sym typeface="Agrandir"/>
-              </a:rPr>
-              <a:t>Early stopping to prevent overfitting</a:t>
-            </a:r>
-          </a:p>
-          <a:p>
-            <a:pPr marL="534662" lvl="1" indent="-267331" algn="l">
-              <a:lnSpc>
-                <a:spcPts val="3467"/>
-              </a:lnSpc>
-              <a:buFont typeface="Arial"/>
-              <a:buChar char="•"/>
-            </a:pPr>
-            <a:r>
-              <a:rPr lang="en-US" sz="2476">
-                <a:solidFill>
-                  <a:srgbClr val="000000"/>
-                </a:solidFill>
-                <a:latin typeface="Agrandir"/>
-                <a:ea typeface="Agrandir"/>
-                <a:cs typeface="Agrandir"/>
-                <a:sym typeface="Agrandir"/>
-              </a:rPr>
-              <a:t>Best model selected using validation loss</a:t>
-            </a:r>
-          </a:p>
-          <a:p>
-            <a:pPr marL="534662" lvl="1" indent="-267331" algn="l">
-              <a:lnSpc>
-                <a:spcPts val="3467"/>
-              </a:lnSpc>
-              <a:buFont typeface="Arial"/>
-              <a:buChar char="•"/>
-            </a:pPr>
-            <a:r>
-              <a:rPr lang="en-US" sz="2476">
-                <a:solidFill>
-                  <a:srgbClr val="000000"/>
-                </a:solidFill>
-                <a:latin typeface="Agrandir"/>
-                <a:ea typeface="Agrandir"/>
-                <a:cs typeface="Agrandir"/>
-                <a:sym typeface="Agrandir"/>
-              </a:rPr>
-              <a:t>Batch size: 8</a:t>
-            </a:r>
-          </a:p>
-          <a:p>
-            <a:pPr marL="534662" lvl="1" indent="-267331" algn="l">
-              <a:lnSpc>
-                <a:spcPts val="3467"/>
-              </a:lnSpc>
-              <a:buFont typeface="Arial"/>
-              <a:buChar char="•"/>
-            </a:pPr>
-            <a:r>
-              <a:rPr lang="en-US" sz="2476">
-                <a:solidFill>
-                  <a:srgbClr val="000000"/>
-                </a:solidFill>
-                <a:latin typeface="Agrandir"/>
-                <a:ea typeface="Agrandir"/>
-                <a:cs typeface="Agrandir"/>
-                <a:sym typeface="Agrandir"/>
-              </a:rPr>
-              <a:t>Learning rate: 1e-5</a:t>
-            </a:r>
-          </a:p>
-          <a:p>
-            <a:pPr marL="534662" lvl="1" indent="-267331" algn="l">
-              <a:lnSpc>
-                <a:spcPts val="3467"/>
-              </a:lnSpc>
-              <a:buFont typeface="Arial"/>
-              <a:buChar char="•"/>
-            </a:pPr>
-            <a:r>
-              <a:rPr lang="en-US" sz="2476">
-                <a:solidFill>
-                  <a:srgbClr val="000000"/>
-                </a:solidFill>
-                <a:latin typeface="Agrandir"/>
-                <a:ea typeface="Agrandir"/>
-                <a:cs typeface="Agrandir"/>
-                <a:sym typeface="Agrandir"/>
-              </a:rPr>
-              <a:t>Epochs: 3</a:t>
-            </a:r>
-          </a:p>
-          <a:p>
-            <a:pPr algn="l">
-              <a:lnSpc>
-                <a:spcPts val="3467"/>
-              </a:lnSpc>
-            </a:pPr>
-            <a:endParaRPr lang="en-US" sz="2476">
+              <a:t>RoBERTa</a:t>
+            </a:r>
+            <a:endParaRPr lang="en-US" sz="2476" dirty="0">
               <a:solidFill>
                 <a:srgbClr val="000000"/>
               </a:solidFill>
@@ -4573,52 +4607,6 @@
             </a:endParaRPr>
           </a:p>
           <a:p>
-            <a:pPr algn="l">
-              <a:lnSpc>
-                <a:spcPts val="3467"/>
-              </a:lnSpc>
-            </a:pPr>
-            <a:endParaRPr lang="en-US" sz="2476">
-              <a:solidFill>
-                <a:srgbClr val="000000"/>
-              </a:solidFill>
-              <a:latin typeface="Agrandir"/>
-              <a:ea typeface="Agrandir"/>
-              <a:cs typeface="Agrandir"/>
-              <a:sym typeface="Agrandir"/>
-            </a:endParaRPr>
-          </a:p>
-        </p:txBody>
-      </p:sp>
-      <p:sp>
-        <p:nvSpPr>
-          <p:cNvPr id="14" name="TextBox 14"/>
-          <p:cNvSpPr txBox="1"/>
-          <p:nvPr/>
-        </p:nvSpPr>
-        <p:spPr>
-          <a:xfrm>
-            <a:off x="5959002" y="2929646"/>
-            <a:ext cx="6071112" cy="4432899"/>
-          </a:xfrm>
-          <a:prstGeom prst="rect">
-            <a:avLst/>
-          </a:prstGeom>
-        </p:spPr>
-        <p:txBody>
-          <a:bodyPr lIns="0" tIns="0" rIns="0" bIns="0" rtlCol="0" anchor="t">
-            <a:spAutoFit/>
-          </a:bodyPr>
-          <a:lstStyle/>
-          <a:p>
-            <a:pPr algn="l">
-              <a:lnSpc>
-                <a:spcPts val="3467"/>
-              </a:lnSpc>
-            </a:pPr>
-            <a:endParaRPr/>
-          </a:p>
-          <a:p>
             <a:pPr marL="534662" lvl="1" indent="-267331" algn="l">
               <a:lnSpc>
                 <a:spcPts val="3467"/>
@@ -4627,7 +4615,7 @@
               <a:buChar char="•"/>
             </a:pPr>
             <a:r>
-              <a:rPr lang="en-US" sz="2476">
+              <a:rPr lang="en-US" sz="2476" dirty="0">
                 <a:solidFill>
                   <a:srgbClr val="000000"/>
                 </a:solidFill>
@@ -4636,7 +4624,7 @@
                 <a:cs typeface="Agrandir"/>
                 <a:sym typeface="Agrandir"/>
               </a:rPr>
-              <a:t>Start from the validated synthetic review dataset</a:t>
+              <a:t>Input: review text</a:t>
             </a:r>
           </a:p>
           <a:p>
@@ -4648,7 +4636,7 @@
               <a:buChar char="•"/>
             </a:pPr>
             <a:r>
-              <a:rPr lang="en-US" sz="2476">
+              <a:rPr lang="en-US" sz="2476" dirty="0">
                 <a:solidFill>
                   <a:srgbClr val="000000"/>
                 </a:solidFill>
@@ -4657,19 +4645,17 @@
                 <a:cs typeface="Agrandir"/>
                 <a:sym typeface="Agrandir"/>
               </a:rPr>
-              <a:t>Split into Train / Validation / Test</a:t>
-            </a:r>
-          </a:p>
-          <a:p>
-            <a:pPr marL="534662" lvl="1" indent="-267331" algn="l">
+              <a:t>Output: continuous aspect-score </a:t>
+            </a:r>
+          </a:p>
+          <a:p>
+            <a:pPr algn="l">
               <a:lnSpc>
                 <a:spcPts val="3467"/>
               </a:lnSpc>
-              <a:buFont typeface="Arial"/>
-              <a:buChar char="•"/>
-            </a:pPr>
-            <a:r>
-              <a:rPr lang="en-US" sz="2476">
+            </a:pPr>
+            <a:r>
+              <a:rPr lang="en-US" sz="2476" dirty="0">
                 <a:solidFill>
                   <a:srgbClr val="000000"/>
                 </a:solidFill>
@@ -4678,7 +4664,7 @@
                 <a:cs typeface="Agrandir"/>
                 <a:sym typeface="Agrandir"/>
               </a:rPr>
-              <a:t>Fine-tune RoBERTa</a:t>
+              <a:t>      vector</a:t>
             </a:r>
           </a:p>
           <a:p>
@@ -4690,7 +4676,7 @@
               <a:buChar char="•"/>
             </a:pPr>
             <a:r>
-              <a:rPr lang="en-US" sz="2476">
+              <a:rPr lang="en-US" sz="2476" dirty="0">
                 <a:solidFill>
                   <a:srgbClr val="000000"/>
                 </a:solidFill>
@@ -4699,7 +4685,7 @@
                 <a:cs typeface="Agrandir"/>
                 <a:sym typeface="Agrandir"/>
               </a:rPr>
-              <a:t>Input: review text</a:t>
+              <a:t>Task: multi-output regression</a:t>
             </a:r>
           </a:p>
           <a:p>
@@ -4711,68 +4697,7 @@
               <a:buChar char="•"/>
             </a:pPr>
             <a:r>
-              <a:rPr lang="en-US" sz="2476">
-                <a:solidFill>
-                  <a:srgbClr val="000000"/>
-                </a:solidFill>
-                <a:latin typeface="Agrandir"/>
-                <a:ea typeface="Agrandir"/>
-                <a:cs typeface="Agrandir"/>
-                <a:sym typeface="Agrandir"/>
-              </a:rPr>
-              <a:t>Output: continuous aspect-score </a:t>
-            </a:r>
-          </a:p>
-          <a:p>
-            <a:pPr algn="l">
-              <a:lnSpc>
-                <a:spcPts val="3467"/>
-              </a:lnSpc>
-            </a:pPr>
-            <a:r>
-              <a:rPr lang="en-US" sz="2476">
-                <a:solidFill>
-                  <a:srgbClr val="000000"/>
-                </a:solidFill>
-                <a:latin typeface="Agrandir"/>
-                <a:ea typeface="Agrandir"/>
-                <a:cs typeface="Agrandir"/>
-                <a:sym typeface="Agrandir"/>
-              </a:rPr>
-              <a:t>      vector</a:t>
-            </a:r>
-          </a:p>
-          <a:p>
-            <a:pPr marL="534662" lvl="1" indent="-267331" algn="l">
-              <a:lnSpc>
-                <a:spcPts val="3467"/>
-              </a:lnSpc>
-              <a:buFont typeface="Arial"/>
-              <a:buChar char="•"/>
-            </a:pPr>
-            <a:r>
-              <a:rPr lang="en-US" sz="2476">
-                <a:solidFill>
-                  <a:srgbClr val="000000"/>
-                </a:solidFill>
-                <a:latin typeface="Agrandir"/>
-                <a:ea typeface="Agrandir"/>
-                <a:cs typeface="Agrandir"/>
-                <a:sym typeface="Agrandir"/>
-              </a:rPr>
-              <a:t>Task: multi-output regression</a:t>
-            </a:r>
-          </a:p>
-          <a:p>
-            <a:pPr marL="534662" lvl="1" indent="-267331" algn="l">
-              <a:lnSpc>
-                <a:spcPts val="3467"/>
-              </a:lnSpc>
-              <a:buFont typeface="Arial"/>
-              <a:buChar char="•"/>
-            </a:pPr>
-            <a:r>
-              <a:rPr lang="en-US" sz="2476">
+              <a:rPr lang="en-US" sz="2476" dirty="0">
                 <a:solidFill>
                   <a:srgbClr val="000000"/>
                 </a:solidFill>
@@ -10050,7 +9975,7 @@
         <p:spPr>
           <a:xfrm>
             <a:off x="12414272" y="3250738"/>
-            <a:ext cx="5734749" cy="6625620"/>
+            <a:ext cx="5734749" cy="5715026"/>
           </a:xfrm>
           <a:prstGeom prst="rect">
             <a:avLst/>
@@ -10062,15 +9987,230 @@
           </a:bodyPr>
           <a:lstStyle/>
           <a:p>
-            <a:pPr marL="501095" lvl="1" indent="-250547" algn="l">
-              <a:lnSpc>
-                <a:spcPts val="3249"/>
+            <a:pPr marL="342900" indent="-342900">
+              <a:buFont typeface="Arial" panose="020B0604020202020204" pitchFamily="34" charset="0"/>
+              <a:buChar char="•"/>
+            </a:pPr>
+            <a:r>
+              <a:rPr lang="" sz="2476" dirty="0">
+                <a:solidFill>
+                  <a:srgbClr val="000000"/>
+                </a:solidFill>
+                <a:latin typeface="Agrandir"/>
+              </a:rPr>
+              <a:t>Loss Function: Mean Squared Error (MSE)</a:t>
+            </a:r>
+          </a:p>
+          <a:p>
+            <a:pPr marL="342900" indent="-342900">
+              <a:buFont typeface="Arial" panose="020B0604020202020204" pitchFamily="34" charset="0"/>
+              <a:buChar char="•"/>
+            </a:pPr>
+            <a:r>
+              <a:rPr lang="" sz="2476" dirty="0">
+                <a:solidFill>
+                  <a:srgbClr val="000000"/>
+                </a:solidFill>
+                <a:latin typeface="Agrandir"/>
+              </a:rPr>
+              <a:t>Learning Rate: 1e-5</a:t>
+            </a:r>
+          </a:p>
+          <a:p>
+            <a:pPr marL="342900" indent="-342900">
+              <a:buFont typeface="Arial" panose="020B0604020202020204" pitchFamily="34" charset="0"/>
+              <a:buChar char="•"/>
+            </a:pPr>
+            <a:r>
+              <a:rPr lang="" sz="2476" dirty="0">
+                <a:solidFill>
+                  <a:srgbClr val="000000"/>
+                </a:solidFill>
+                <a:latin typeface="Agrandir"/>
+              </a:rPr>
+              <a:t>Batch Size: 8</a:t>
+            </a:r>
+          </a:p>
+          <a:p>
+            <a:pPr marL="342900" indent="-342900">
+              <a:buFont typeface="Arial" panose="020B0604020202020204" pitchFamily="34" charset="0"/>
+              <a:buChar char="•"/>
+            </a:pPr>
+            <a:r>
+              <a:rPr lang="" sz="2476" dirty="0">
+                <a:solidFill>
+                  <a:srgbClr val="000000"/>
+                </a:solidFill>
+                <a:latin typeface="Agrandir"/>
+              </a:rPr>
+              <a:t>Epochs: 3</a:t>
+            </a:r>
+          </a:p>
+          <a:p>
+            <a:pPr marL="342900" indent="-342900">
+              <a:buFont typeface="Arial" panose="020B0604020202020204" pitchFamily="34" charset="0"/>
+              <a:buChar char="•"/>
+            </a:pPr>
+            <a:r>
+              <a:rPr lang="" sz="2476" dirty="0">
+                <a:solidFill>
+                  <a:srgbClr val="000000"/>
+                </a:solidFill>
+                <a:latin typeface="Agrandir"/>
+              </a:rPr>
+              <a:t>Weight Decay: 0.01</a:t>
+            </a:r>
+          </a:p>
+          <a:p>
+            <a:pPr marL="342900" indent="-342900">
+              <a:buFont typeface="Arial" panose="020B0604020202020204" pitchFamily="34" charset="0"/>
+              <a:buChar char="•"/>
+            </a:pPr>
+            <a:r>
+              <a:rPr lang="" sz="2476" dirty="0">
+                <a:solidFill>
+                  <a:srgbClr val="000000"/>
+                </a:solidFill>
+                <a:latin typeface="Agrandir"/>
+              </a:rPr>
+              <a:t>Maximum Sequence Length: 256</a:t>
+            </a:r>
+          </a:p>
+          <a:p>
+            <a:pPr marL="342900" indent="-342900">
+              <a:buFont typeface="Arial" panose="020B0604020202020204" pitchFamily="34" charset="0"/>
+              <a:buChar char="•"/>
+            </a:pPr>
+            <a:r>
+              <a:rPr lang="" sz="2476" dirty="0">
+                <a:solidFill>
+                  <a:srgbClr val="000000"/>
+                </a:solidFill>
+                <a:latin typeface="Agrandir"/>
+              </a:rPr>
+              <a:t>Hidden Dropout: 0.1</a:t>
+            </a:r>
+          </a:p>
+          <a:p>
+            <a:pPr marL="342900" indent="-342900">
+              <a:buFont typeface="Arial" panose="020B0604020202020204" pitchFamily="34" charset="0"/>
+              <a:buChar char="•"/>
+            </a:pPr>
+            <a:r>
+              <a:rPr lang="" sz="2476" dirty="0">
+                <a:solidFill>
+                  <a:srgbClr val="000000"/>
+                </a:solidFill>
+                <a:latin typeface="Agrandir"/>
+              </a:rPr>
+              <a:t>Attention Dropout: 0.1</a:t>
+            </a:r>
+          </a:p>
+          <a:p>
+            <a:pPr marL="342900" indent="-342900">
+              <a:buFont typeface="Arial" panose="020B0604020202020204" pitchFamily="34" charset="0"/>
+              <a:buChar char="•"/>
+            </a:pPr>
+            <a:r>
+              <a:rPr lang="" sz="2476" dirty="0">
+                <a:solidFill>
+                  <a:srgbClr val="000000"/>
+                </a:solidFill>
+                <a:latin typeface="Agrandir"/>
+              </a:rPr>
+              <a:t>Classifier Dropout: 0.1</a:t>
+            </a:r>
+          </a:p>
+          <a:p>
+            <a:pPr marL="342900" indent="-342900">
+              <a:buFont typeface="Arial" panose="020B0604020202020204" pitchFamily="34" charset="0"/>
+              <a:buChar char="•"/>
+            </a:pPr>
+            <a:r>
+              <a:rPr lang="" sz="2476" dirty="0">
+                <a:solidFill>
+                  <a:srgbClr val="000000"/>
+                </a:solidFill>
+                <a:latin typeface="Agrandir"/>
+              </a:rPr>
+              <a:t>Dynamic Padding (DataCollatorWithPadding)</a:t>
+            </a:r>
+          </a:p>
+          <a:p>
+            <a:pPr marL="342900" indent="-342900">
+              <a:buFont typeface="Arial" panose="020B0604020202020204" pitchFamily="34" charset="0"/>
+              <a:buChar char="•"/>
+            </a:pPr>
+            <a:r>
+              <a:rPr lang="" sz="2476" dirty="0">
+                <a:solidFill>
+                  <a:srgbClr val="000000"/>
+                </a:solidFill>
+                <a:latin typeface="Agrandir"/>
+              </a:rPr>
+              <a:t>Early Stopping (Patience = 1)</a:t>
+            </a:r>
+          </a:p>
+          <a:p>
+            <a:pPr marL="342900" indent="-342900">
+              <a:buFont typeface="Arial" panose="020B0604020202020204" pitchFamily="34" charset="0"/>
+              <a:buChar char="•"/>
+            </a:pPr>
+            <a:r>
+              <a:rPr lang="" sz="2476" dirty="0">
+                <a:solidFill>
+                  <a:srgbClr val="000000"/>
+                </a:solidFill>
+                <a:latin typeface="Agrandir"/>
+              </a:rPr>
+              <a:t>Best Model Selection using Validation</a:t>
+            </a:r>
+            <a:r>
+              <a:rPr lang="" dirty="0"/>
+              <a:t> </a:t>
+            </a:r>
+            <a:r>
+              <a:rPr lang="" sz="2476" dirty="0">
+                <a:solidFill>
+                  <a:srgbClr val="000000"/>
+                </a:solidFill>
+                <a:latin typeface="Agrandir"/>
+              </a:rPr>
+              <a:t>Loss</a:t>
+            </a:r>
+          </a:p>
+        </p:txBody>
+      </p:sp>
+      <p:sp>
+        <p:nvSpPr>
+          <p:cNvPr id="14" name="TextBox 14"/>
+          <p:cNvSpPr txBox="1"/>
+          <p:nvPr/>
+        </p:nvSpPr>
+        <p:spPr>
+          <a:xfrm>
+            <a:off x="5959002" y="3238030"/>
+            <a:ext cx="6071112" cy="3994749"/>
+          </a:xfrm>
+          <a:prstGeom prst="rect">
+            <a:avLst/>
+          </a:prstGeom>
+        </p:spPr>
+        <p:txBody>
+          <a:bodyPr lIns="0" tIns="0" rIns="0" bIns="0" rtlCol="0" anchor="t">
+            <a:spAutoFit/>
+          </a:bodyPr>
+          <a:lstStyle/>
+          <a:p>
+            <a:pPr marL="534662" lvl="1" indent="-267331" algn="l">
+              <a:lnSpc>
+                <a:spcPts val="3467"/>
               </a:lnSpc>
               <a:buFont typeface="Arial"/>
               <a:buChar char="•"/>
             </a:pPr>
             <a:r>
-              <a:rPr lang="en-US" sz="2320">
+              <a:rPr lang="en-US" sz="2476" dirty="0">
                 <a:solidFill>
                   <a:srgbClr val="000000"/>
                 </a:solidFill>
@@ -10079,19 +10219,19 @@
                 <a:cs typeface="Agrandir"/>
                 <a:sym typeface="Agrandir"/>
               </a:rPr>
-              <a:t>Loss Function: MSE = 1/n Σ(yi - ŷi)²</a:t>
-            </a:r>
-          </a:p>
-          <a:p>
-            <a:pPr marL="501095" lvl="1" indent="-250547" algn="l">
-              <a:lnSpc>
-                <a:spcPts val="3249"/>
+              <a:t>Start from the validated synthetic review dataset</a:t>
+            </a:r>
+          </a:p>
+          <a:p>
+            <a:pPr marL="534662" lvl="1" indent="-267331" algn="l">
+              <a:lnSpc>
+                <a:spcPts val="3467"/>
               </a:lnSpc>
               <a:buFont typeface="Arial"/>
               <a:buChar char="•"/>
             </a:pPr>
             <a:r>
-              <a:rPr lang="en-US" sz="2320">
+              <a:rPr lang="en-US" sz="2476" dirty="0">
                 <a:solidFill>
                   <a:srgbClr val="000000"/>
                 </a:solidFill>
@@ -10100,17 +10240,19 @@
                 <a:cs typeface="Agrandir"/>
                 <a:sym typeface="Agrandir"/>
               </a:rPr>
-              <a:t>Prediction Thresholds:</a:t>
-            </a:r>
-          </a:p>
-          <a:p>
-            <a:pPr algn="l">
-              <a:lnSpc>
-                <a:spcPts val="3249"/>
-              </a:lnSpc>
-            </a:pPr>
-            <a:r>
-              <a:rPr lang="en-US" sz="2320">
+              <a:t>Split into Train / Validation / Test</a:t>
+            </a:r>
+          </a:p>
+          <a:p>
+            <a:pPr marL="534662" lvl="1" indent="-267331" algn="l">
+              <a:lnSpc>
+                <a:spcPts val="3467"/>
+              </a:lnSpc>
+              <a:buFont typeface="Arial"/>
+              <a:buChar char="•"/>
+            </a:pPr>
+            <a:r>
+              <a:rPr lang="en-US" sz="2476" dirty="0">
                 <a:solidFill>
                   <a:srgbClr val="000000"/>
                 </a:solidFill>
@@ -10119,17 +10261,10 @@
                 <a:cs typeface="Agrandir"/>
                 <a:sym typeface="Agrandir"/>
               </a:rPr>
-              <a:t>       ŷ ≥ 0.5 → Positive (+1)</a:t>
-            </a:r>
-          </a:p>
-          <a:p>
-            <a:pPr algn="l">
-              <a:lnSpc>
-                <a:spcPts val="3249"/>
-              </a:lnSpc>
-            </a:pPr>
-            <a:r>
-              <a:rPr lang="en-US" sz="2320">
+              <a:t>Fine-tune </a:t>
+            </a:r>
+            <a:r>
+              <a:rPr lang="en-US" sz="2476" dirty="0" err="1">
                 <a:solidFill>
                   <a:srgbClr val="000000"/>
                 </a:solidFill>
@@ -10138,182 +10273,9 @@
                 <a:cs typeface="Agrandir"/>
                 <a:sym typeface="Agrandir"/>
               </a:rPr>
-              <a:t>       ŷ ≤ -0.5 → Negative (-1)</a:t>
-            </a:r>
-          </a:p>
-          <a:p>
-            <a:pPr algn="l">
-              <a:lnSpc>
-                <a:spcPts val="3249"/>
-              </a:lnSpc>
-            </a:pPr>
-            <a:r>
-              <a:rPr lang="en-US" sz="2320">
-                <a:solidFill>
-                  <a:srgbClr val="000000"/>
-                </a:solidFill>
-                <a:latin typeface="Agrandir"/>
-                <a:ea typeface="Agrandir"/>
-                <a:cs typeface="Agrandir"/>
-                <a:sym typeface="Agrandir"/>
-              </a:rPr>
-              <a:t>       otherwise → Not Mentioned (0)</a:t>
-            </a:r>
-          </a:p>
-          <a:p>
-            <a:pPr marL="501095" lvl="1" indent="-250547" algn="l">
-              <a:lnSpc>
-                <a:spcPts val="3249"/>
-              </a:lnSpc>
-              <a:buFont typeface="Arial"/>
-              <a:buChar char="•"/>
-            </a:pPr>
-            <a:r>
-              <a:rPr lang="en-US" sz="2320">
-                <a:solidFill>
-                  <a:srgbClr val="000000"/>
-                </a:solidFill>
-                <a:latin typeface="Agrandir"/>
-                <a:ea typeface="Agrandir"/>
-                <a:cs typeface="Agrandir"/>
-                <a:sym typeface="Agrandir"/>
-              </a:rPr>
-              <a:t>Dynamic padding using DataCollatorWithPadding</a:t>
-            </a:r>
-          </a:p>
-          <a:p>
-            <a:pPr marL="501095" lvl="1" indent="-250547" algn="l">
-              <a:lnSpc>
-                <a:spcPts val="3249"/>
-              </a:lnSpc>
-              <a:buFont typeface="Arial"/>
-              <a:buChar char="•"/>
-            </a:pPr>
-            <a:r>
-              <a:rPr lang="en-US" sz="2320">
-                <a:solidFill>
-                  <a:srgbClr val="000000"/>
-                </a:solidFill>
-                <a:latin typeface="Agrandir"/>
-                <a:ea typeface="Agrandir"/>
-                <a:cs typeface="Agrandir"/>
-                <a:sym typeface="Agrandir"/>
-              </a:rPr>
-              <a:t>Early stopping based on validation loss</a:t>
-            </a:r>
-          </a:p>
-          <a:p>
-            <a:pPr marL="501095" lvl="1" indent="-250547" algn="l">
-              <a:lnSpc>
-                <a:spcPts val="3249"/>
-              </a:lnSpc>
-              <a:buFont typeface="Arial"/>
-              <a:buChar char="•"/>
-            </a:pPr>
-            <a:r>
-              <a:rPr lang="en-US" sz="2320">
-                <a:solidFill>
-                  <a:srgbClr val="000000"/>
-                </a:solidFill>
-                <a:latin typeface="Agrandir"/>
-                <a:ea typeface="Agrandir"/>
-                <a:cs typeface="Agrandir"/>
-                <a:sym typeface="Agrandir"/>
-              </a:rPr>
-              <a:t>Best checkpoint selected automatically</a:t>
-            </a:r>
-          </a:p>
-          <a:p>
-            <a:pPr marL="501095" lvl="1" indent="-250547" algn="l">
-              <a:lnSpc>
-                <a:spcPts val="3249"/>
-              </a:lnSpc>
-              <a:buFont typeface="Arial"/>
-              <a:buChar char="•"/>
-            </a:pPr>
-            <a:r>
-              <a:rPr lang="en-US" sz="2320">
-                <a:solidFill>
-                  <a:srgbClr val="000000"/>
-                </a:solidFill>
-                <a:latin typeface="Agrandir"/>
-                <a:ea typeface="Agrandir"/>
-                <a:cs typeface="Agrandir"/>
-                <a:sym typeface="Agrandir"/>
-              </a:rPr>
-              <a:t>Batch size: 8</a:t>
-            </a:r>
-          </a:p>
-          <a:p>
-            <a:pPr marL="501095" lvl="1" indent="-250547" algn="l">
-              <a:lnSpc>
-                <a:spcPts val="3249"/>
-              </a:lnSpc>
-              <a:buFont typeface="Arial"/>
-              <a:buChar char="•"/>
-            </a:pPr>
-            <a:r>
-              <a:rPr lang="en-US" sz="2320">
-                <a:solidFill>
-                  <a:srgbClr val="000000"/>
-                </a:solidFill>
-                <a:latin typeface="Agrandir"/>
-                <a:ea typeface="Agrandir"/>
-                <a:cs typeface="Agrandir"/>
-                <a:sym typeface="Agrandir"/>
-              </a:rPr>
-              <a:t>Learning rate: 1e-5</a:t>
-            </a:r>
-          </a:p>
-          <a:p>
-            <a:pPr marL="501095" lvl="1" indent="-250547" algn="l">
-              <a:lnSpc>
-                <a:spcPts val="3249"/>
-              </a:lnSpc>
-              <a:buFont typeface="Arial"/>
-              <a:buChar char="•"/>
-            </a:pPr>
-            <a:r>
-              <a:rPr lang="en-US" sz="2320">
-                <a:solidFill>
-                  <a:srgbClr val="000000"/>
-                </a:solidFill>
-                <a:latin typeface="Agrandir"/>
-                <a:ea typeface="Agrandir"/>
-                <a:cs typeface="Agrandir"/>
-                <a:sym typeface="Agrandir"/>
-              </a:rPr>
-              <a:t>Weight decay: 0.01</a:t>
-            </a:r>
-          </a:p>
-          <a:p>
-            <a:pPr marL="501095" lvl="1" indent="-250547" algn="l">
-              <a:lnSpc>
-                <a:spcPts val="3249"/>
-              </a:lnSpc>
-              <a:buFont typeface="Arial"/>
-              <a:buChar char="•"/>
-            </a:pPr>
-            <a:r>
-              <a:rPr lang="en-US" sz="2320">
-                <a:solidFill>
-                  <a:srgbClr val="000000"/>
-                </a:solidFill>
-                <a:latin typeface="Agrandir"/>
-                <a:ea typeface="Agrandir"/>
-                <a:cs typeface="Agrandir"/>
-                <a:sym typeface="Agrandir"/>
-              </a:rPr>
-              <a:t>Epochs: 3</a:t>
-            </a:r>
-          </a:p>
-          <a:p>
-            <a:pPr algn="l">
-              <a:lnSpc>
-                <a:spcPts val="3249"/>
-              </a:lnSpc>
-            </a:pPr>
-            <a:endParaRPr lang="en-US" sz="2320">
+              <a:t>RoBERTa</a:t>
+            </a:r>
+            <a:endParaRPr lang="en-US" sz="2476" dirty="0">
               <a:solidFill>
                 <a:srgbClr val="000000"/>
               </a:solidFill>
@@ -10323,28 +10285,6 @@
               <a:sym typeface="Agrandir"/>
             </a:endParaRPr>
           </a:p>
-        </p:txBody>
-      </p:sp>
-      <p:sp>
-        <p:nvSpPr>
-          <p:cNvPr id="14" name="TextBox 14"/>
-          <p:cNvSpPr txBox="1"/>
-          <p:nvPr/>
-        </p:nvSpPr>
-        <p:spPr>
-          <a:xfrm>
-            <a:off x="5959002" y="3238030"/>
-            <a:ext cx="6071112" cy="3994749"/>
-          </a:xfrm>
-          <a:prstGeom prst="rect">
-            <a:avLst/>
-          </a:prstGeom>
-        </p:spPr>
-        <p:txBody>
-          <a:bodyPr lIns="0" tIns="0" rIns="0" bIns="0" rtlCol="0" anchor="t">
-            <a:spAutoFit/>
-          </a:bodyPr>
-          <a:lstStyle/>
           <a:p>
             <a:pPr marL="534662" lvl="1" indent="-267331" algn="l">
               <a:lnSpc>
@@ -10354,7 +10294,7 @@
               <a:buChar char="•"/>
             </a:pPr>
             <a:r>
-              <a:rPr lang="en-US" sz="2476">
+              <a:rPr lang="en-US" sz="2476" dirty="0">
                 <a:solidFill>
                   <a:srgbClr val="000000"/>
                 </a:solidFill>
@@ -10363,7 +10303,7 @@
                 <a:cs typeface="Agrandir"/>
                 <a:sym typeface="Agrandir"/>
               </a:rPr>
-              <a:t>Start from the validated synthetic review dataset</a:t>
+              <a:t> Input: review text</a:t>
             </a:r>
           </a:p>
           <a:p>
@@ -10375,7 +10315,7 @@
               <a:buChar char="•"/>
             </a:pPr>
             <a:r>
-              <a:rPr lang="en-US" sz="2476">
+              <a:rPr lang="en-US" sz="2476" dirty="0">
                 <a:solidFill>
                   <a:srgbClr val="000000"/>
                 </a:solidFill>
@@ -10384,19 +10324,17 @@
                 <a:cs typeface="Agrandir"/>
                 <a:sym typeface="Agrandir"/>
               </a:rPr>
-              <a:t>Split into Train / Validation / Test</a:t>
-            </a:r>
-          </a:p>
-          <a:p>
-            <a:pPr marL="534662" lvl="1" indent="-267331" algn="l">
+              <a:t> Output: continuous aspect-score </a:t>
+            </a:r>
+          </a:p>
+          <a:p>
+            <a:pPr algn="l">
               <a:lnSpc>
                 <a:spcPts val="3467"/>
               </a:lnSpc>
-              <a:buFont typeface="Arial"/>
-              <a:buChar char="•"/>
-            </a:pPr>
-            <a:r>
-              <a:rPr lang="en-US" sz="2476">
+            </a:pPr>
+            <a:r>
+              <a:rPr lang="en-US" sz="2476" dirty="0">
                 <a:solidFill>
                   <a:srgbClr val="000000"/>
                 </a:solidFill>
@@ -10405,7 +10343,7 @@
                 <a:cs typeface="Agrandir"/>
                 <a:sym typeface="Agrandir"/>
               </a:rPr>
-              <a:t>Fine-tune RoBERTa</a:t>
+              <a:t>       vector</a:t>
             </a:r>
           </a:p>
           <a:p>
@@ -10417,7 +10355,7 @@
               <a:buChar char="•"/>
             </a:pPr>
             <a:r>
-              <a:rPr lang="en-US" sz="2476">
+              <a:rPr lang="en-US" sz="2476" dirty="0">
                 <a:solidFill>
                   <a:srgbClr val="000000"/>
                 </a:solidFill>
@@ -10426,7 +10364,7 @@
                 <a:cs typeface="Agrandir"/>
                 <a:sym typeface="Agrandir"/>
               </a:rPr>
-              <a:t> Input: review text</a:t>
+              <a:t> Task: multi-output regression</a:t>
             </a:r>
           </a:p>
           <a:p>
@@ -10438,68 +10376,7 @@
               <a:buChar char="•"/>
             </a:pPr>
             <a:r>
-              <a:rPr lang="en-US" sz="2476">
-                <a:solidFill>
-                  <a:srgbClr val="000000"/>
-                </a:solidFill>
-                <a:latin typeface="Agrandir"/>
-                <a:ea typeface="Agrandir"/>
-                <a:cs typeface="Agrandir"/>
-                <a:sym typeface="Agrandir"/>
-              </a:rPr>
-              <a:t> Output: continuous aspect-score </a:t>
-            </a:r>
-          </a:p>
-          <a:p>
-            <a:pPr algn="l">
-              <a:lnSpc>
-                <a:spcPts val="3467"/>
-              </a:lnSpc>
-            </a:pPr>
-            <a:r>
-              <a:rPr lang="en-US" sz="2476">
-                <a:solidFill>
-                  <a:srgbClr val="000000"/>
-                </a:solidFill>
-                <a:latin typeface="Agrandir"/>
-                <a:ea typeface="Agrandir"/>
-                <a:cs typeface="Agrandir"/>
-                <a:sym typeface="Agrandir"/>
-              </a:rPr>
-              <a:t>       vector</a:t>
-            </a:r>
-          </a:p>
-          <a:p>
-            <a:pPr marL="534662" lvl="1" indent="-267331" algn="l">
-              <a:lnSpc>
-                <a:spcPts val="3467"/>
-              </a:lnSpc>
-              <a:buFont typeface="Arial"/>
-              <a:buChar char="•"/>
-            </a:pPr>
-            <a:r>
-              <a:rPr lang="en-US" sz="2476">
-                <a:solidFill>
-                  <a:srgbClr val="000000"/>
-                </a:solidFill>
-                <a:latin typeface="Agrandir"/>
-                <a:ea typeface="Agrandir"/>
-                <a:cs typeface="Agrandir"/>
-                <a:sym typeface="Agrandir"/>
-              </a:rPr>
-              <a:t> Task: multi-output regression</a:t>
-            </a:r>
-          </a:p>
-          <a:p>
-            <a:pPr marL="534662" lvl="1" indent="-267331" algn="l">
-              <a:lnSpc>
-                <a:spcPts val="3467"/>
-              </a:lnSpc>
-              <a:buFont typeface="Arial"/>
-              <a:buChar char="•"/>
-            </a:pPr>
-            <a:r>
-              <a:rPr lang="en-US" sz="2476">
+              <a:rPr lang="en-US" sz="2476" dirty="0">
                 <a:solidFill>
                   <a:srgbClr val="000000"/>
                 </a:solidFill>
